--- a/QueAns/ReactQusAns.pptx
+++ b/QueAns/ReactQusAns.pptx
@@ -343,7 +343,7 @@
           <a:p>
             <a:fld id="{82EDB8D0-98ED-4B86-9D5F-E61ADC70144D}" type="datetimeFigureOut">
               <a:rPr lang="en-US" smtClean="0"/>
-              <a:t>1/31/2024</a:t>
+              <a:t>3/9/2024</a:t>
             </a:fld>
             <a:endParaRPr lang="en-US" dirty="0"/>
           </a:p>
@@ -551,7 +551,7 @@
           <a:p>
             <a:fld id="{82EDB8D0-98ED-4B86-9D5F-E61ADC70144D}" type="datetimeFigureOut">
               <a:rPr lang="en-US" smtClean="0"/>
-              <a:t>1/31/2024</a:t>
+              <a:t>3/9/2024</a:t>
             </a:fld>
             <a:endParaRPr lang="en-US"/>
           </a:p>
@@ -807,7 +807,7 @@
           <a:p>
             <a:fld id="{82EDB8D0-98ED-4B86-9D5F-E61ADC70144D}" type="datetimeFigureOut">
               <a:rPr lang="en-US" smtClean="0"/>
-              <a:t>1/31/2024</a:t>
+              <a:t>3/9/2024</a:t>
             </a:fld>
             <a:endParaRPr lang="en-US"/>
           </a:p>
@@ -977,7 +977,7 @@
           <a:p>
             <a:fld id="{82EDB8D0-98ED-4B86-9D5F-E61ADC70144D}" type="datetimeFigureOut">
               <a:rPr lang="en-US" smtClean="0"/>
-              <a:t>1/31/2024</a:t>
+              <a:t>3/9/2024</a:t>
             </a:fld>
             <a:endParaRPr lang="en-US" dirty="0"/>
           </a:p>
@@ -1320,7 +1320,7 @@
           <a:p>
             <a:fld id="{82EDB8D0-98ED-4B86-9D5F-E61ADC70144D}" type="datetimeFigureOut">
               <a:rPr lang="en-US" smtClean="0"/>
-              <a:t>1/31/2024</a:t>
+              <a:t>3/9/2024</a:t>
             </a:fld>
             <a:endParaRPr lang="en-US"/>
           </a:p>
@@ -1595,7 +1595,7 @@
           <a:p>
             <a:fld id="{82EDB8D0-98ED-4B86-9D5F-E61ADC70144D}" type="datetimeFigureOut">
               <a:rPr lang="en-US" smtClean="0"/>
-              <a:t>1/31/2024</a:t>
+              <a:t>3/9/2024</a:t>
             </a:fld>
             <a:endParaRPr lang="en-US"/>
           </a:p>
@@ -1974,7 +1974,7 @@
           <a:p>
             <a:fld id="{82EDB8D0-98ED-4B86-9D5F-E61ADC70144D}" type="datetimeFigureOut">
               <a:rPr lang="en-US" smtClean="0"/>
-              <a:t>1/31/2024</a:t>
+              <a:t>3/9/2024</a:t>
             </a:fld>
             <a:endParaRPr lang="en-US"/>
           </a:p>
@@ -2092,7 +2092,7 @@
           <a:p>
             <a:fld id="{82EDB8D0-98ED-4B86-9D5F-E61ADC70144D}" type="datetimeFigureOut">
               <a:rPr lang="en-US" smtClean="0"/>
-              <a:t>1/31/2024</a:t>
+              <a:t>3/9/2024</a:t>
             </a:fld>
             <a:endParaRPr lang="en-US"/>
           </a:p>
@@ -2263,7 +2263,7 @@
           <a:p>
             <a:fld id="{82EDB8D0-98ED-4B86-9D5F-E61ADC70144D}" type="datetimeFigureOut">
               <a:rPr lang="en-US" smtClean="0"/>
-              <a:t>1/31/2024</a:t>
+              <a:t>3/9/2024</a:t>
             </a:fld>
             <a:endParaRPr lang="en-US"/>
           </a:p>
@@ -2617,7 +2617,7 @@
           <a:p>
             <a:fld id="{82EDB8D0-98ED-4B86-9D5F-E61ADC70144D}" type="datetimeFigureOut">
               <a:rPr lang="en-US" smtClean="0"/>
-              <a:t>1/31/2024</a:t>
+              <a:t>3/9/2024</a:t>
             </a:fld>
             <a:endParaRPr lang="en-US"/>
           </a:p>
@@ -2994,7 +2994,7 @@
           <a:p>
             <a:fld id="{82EDB8D0-98ED-4B86-9D5F-E61ADC70144D}" type="datetimeFigureOut">
               <a:rPr lang="en-US" smtClean="0"/>
-              <a:t>1/31/2024</a:t>
+              <a:t>3/9/2024</a:t>
             </a:fld>
             <a:endParaRPr lang="en-US"/>
           </a:p>
@@ -3282,7 +3282,7 @@
             <a:fld id="{82EDB8D0-98ED-4B86-9D5F-E61ADC70144D}" type="datetimeFigureOut">
               <a:rPr lang="en-US" smtClean="0"/>
               <a:pPr/>
-              <a:t>1/31/2024</a:t>
+              <a:t>3/9/2024</a:t>
             </a:fld>
             <a:endParaRPr lang="en-US" dirty="0"/>
           </a:p>
@@ -6332,7 +6332,7 @@
         <p:spPr>
           <a:xfrm>
             <a:off x="254493" y="390618"/>
-            <a:ext cx="11872404" cy="7417415"/>
+            <a:ext cx="11872404" cy="7078861"/>
           </a:xfrm>
           <a:prstGeom prst="rect">
             <a:avLst/>
@@ -6457,14 +6457,14 @@
                 <a:latin typeface="Google Sans"/>
                 <a:cs typeface="Arial" panose="020B0604020202020204" pitchFamily="34" charset="0"/>
               </a:rPr>
-              <a:t>Que 29: </a:t>
-            </a:r>
-            <a:r>
-              <a:rPr lang="en-US" sz="1400" dirty="0">
-                <a:latin typeface="Google Sans"/>
-                <a:cs typeface="Arial" panose="020B0604020202020204" pitchFamily="34" charset="0"/>
-              </a:rPr>
-              <a:t>How  many types of hooks in react js?</a:t>
+              <a:t>Que 38: </a:t>
+            </a:r>
+            <a:r>
+              <a:rPr lang="en-US" sz="1400" dirty="0">
+                <a:latin typeface="Google Sans"/>
+                <a:cs typeface="Arial" panose="020B0604020202020204" pitchFamily="34" charset="0"/>
+              </a:rPr>
+              <a:t>Which effect used for dom handling in function component?</a:t>
             </a:r>
           </a:p>
           <a:p>
@@ -6480,7 +6480,7 @@
                 <a:latin typeface="Google Sans"/>
                 <a:cs typeface="Arial" panose="020B0604020202020204" pitchFamily="34" charset="0"/>
               </a:rPr>
-              <a:t>In react version 18 provide 15 types of hooks.</a:t>
+              <a:t>We can used useRef for dom handling in function component .</a:t>
             </a:r>
           </a:p>
           <a:p>
@@ -6495,14 +6495,14 @@
                 <a:latin typeface="Google Sans"/>
                 <a:cs typeface="Arial" panose="020B0604020202020204" pitchFamily="34" charset="0"/>
               </a:rPr>
-              <a:t>Que 30:</a:t>
-            </a:r>
-            <a:r>
-              <a:rPr lang="en-US" sz="1400" dirty="0">
-                <a:latin typeface="Google Sans"/>
-                <a:cs typeface="Arial" panose="020B0604020202020204" pitchFamily="34" charset="0"/>
-              </a:rPr>
-              <a:t> Will a hook be used in a class component?</a:t>
+              <a:t>Que 39:</a:t>
+            </a:r>
+            <a:r>
+              <a:rPr lang="en-US" sz="1400" dirty="0">
+                <a:latin typeface="Google Sans"/>
+                <a:cs typeface="Arial" panose="020B0604020202020204" pitchFamily="34" charset="0"/>
+              </a:rPr>
+              <a:t> Which one is better useRef or useState ?</a:t>
             </a:r>
           </a:p>
           <a:p>
@@ -6521,7 +6521,7 @@
                 <a:latin typeface="Google Sans"/>
                 <a:cs typeface="Arial" panose="020B0604020202020204" pitchFamily="34" charset="0"/>
               </a:rPr>
-              <a:t>No, not possible.</a:t>
+              <a:t>We can used both ref and state also but useRef is directly target to the dom so avoid the use of uesRef.</a:t>
             </a:r>
           </a:p>
           <a:p>
@@ -6539,14 +6539,14 @@
                 <a:latin typeface="Google Sans"/>
                 <a:cs typeface="Arial" panose="020B0604020202020204" pitchFamily="34" charset="0"/>
               </a:rPr>
-              <a:t>Que 31:</a:t>
-            </a:r>
-            <a:r>
-              <a:rPr lang="en-US" sz="1400" dirty="0">
-                <a:latin typeface="Google Sans"/>
-                <a:cs typeface="Arial" panose="020B0604020202020204" pitchFamily="34" charset="0"/>
-              </a:rPr>
-              <a:t> What is useEffect hook?</a:t>
+              <a:t>Que 40:</a:t>
+            </a:r>
+            <a:r>
+              <a:rPr lang="en-US" sz="1400" dirty="0">
+                <a:latin typeface="Google Sans"/>
+                <a:cs typeface="Arial" panose="020B0604020202020204" pitchFamily="34" charset="0"/>
+              </a:rPr>
+              <a:t> What is controlled component?</a:t>
             </a:r>
           </a:p>
           <a:p>
@@ -6565,17 +6565,43 @@
                 <a:effectLst/>
                 <a:latin typeface="Google Sans"/>
               </a:rPr>
-              <a:t>The useEffect hook in React is </a:t>
+              <a:t>In this component </a:t>
+            </a:r>
+            <a:r>
+              <a:rPr lang="en-US" sz="1400" dirty="0">
+                <a:solidFill>
+                  <a:srgbClr val="202124"/>
+                </a:solidFill>
+                <a:latin typeface="Google Sans"/>
+              </a:rPr>
+              <a:t>flied handle by state it’s</a:t>
             </a:r>
             <a:r>
               <a:rPr lang="en-US" sz="1400" b="0" i="0" dirty="0">
                 <a:solidFill>
-                  <a:srgbClr val="040C28"/>
+                  <a:srgbClr val="202124"/>
                 </a:solidFill>
                 <a:effectLst/>
                 <a:latin typeface="Google Sans"/>
               </a:rPr>
-              <a:t>used to handle the side effects in React such as fetching data, and updating DOM</a:t>
+              <a:t> called </a:t>
+            </a:r>
+            <a:r>
+              <a:rPr lang="en-US" sz="1400" dirty="0">
+                <a:latin typeface="Google Sans"/>
+                <a:cs typeface="Arial" panose="020B0604020202020204" pitchFamily="34" charset="0"/>
+              </a:rPr>
+              <a:t>controlled</a:t>
+            </a:r>
+            <a:r>
+              <a:rPr lang="en-US" sz="1400" b="0" i="0" dirty="0">
+                <a:solidFill>
+                  <a:srgbClr val="202124"/>
+                </a:solidFill>
+                <a:effectLst/>
+                <a:latin typeface="Google Sans"/>
+              </a:rPr>
+              <a:t> component</a:t>
             </a:r>
             <a:r>
               <a:rPr lang="en-US" sz="1400" dirty="0">
@@ -6593,54 +6619,90 @@
             </a:endParaRPr>
           </a:p>
           <a:p>
-            <a:r>
-              <a:rPr lang="en-IN" sz="1400" dirty="0">
+            <a:endParaRPr lang="en-IN" sz="1400" dirty="0">
+              <a:latin typeface="Google Sans"/>
+              <a:cs typeface="Arial" panose="020B0604020202020204" pitchFamily="34" charset="0"/>
+            </a:endParaRPr>
+          </a:p>
+          <a:p>
+            <a:r>
+              <a:rPr lang="en-US" sz="1400" b="1" dirty="0">
+                <a:latin typeface="Google Sans"/>
+                <a:cs typeface="Arial" panose="020B0604020202020204" pitchFamily="34" charset="0"/>
+              </a:rPr>
+              <a:t>Que 41:</a:t>
+            </a:r>
+            <a:r>
+              <a:rPr lang="en-US" sz="1400" dirty="0">
+                <a:latin typeface="Google Sans"/>
+                <a:cs typeface="Arial" panose="020B0604020202020204" pitchFamily="34" charset="0"/>
+              </a:rPr>
+              <a:t> What is uncontrolled component?</a:t>
+            </a:r>
+          </a:p>
+          <a:p>
+            <a:r>
+              <a:rPr lang="en-US" sz="1400" b="1" dirty="0">
+                <a:latin typeface="Google Sans"/>
+                <a:cs typeface="Arial" panose="020B0604020202020204" pitchFamily="34" charset="0"/>
+              </a:rPr>
+              <a:t>Ans: </a:t>
+            </a:r>
+            <a:r>
+              <a:rPr lang="en-US" sz="1400" b="0" i="0" dirty="0">
+                <a:solidFill>
+                  <a:srgbClr val="202124"/>
+                </a:solidFill>
+                <a:effectLst/>
+                <a:latin typeface="Google Sans"/>
+              </a:rPr>
+              <a:t>In this component </a:t>
+            </a:r>
+            <a:r>
+              <a:rPr lang="en-US" sz="1400" dirty="0">
+                <a:solidFill>
+                  <a:srgbClr val="202124"/>
+                </a:solidFill>
+                <a:latin typeface="Google Sans"/>
+              </a:rPr>
+              <a:t>flied handle directly target to the dom element(like, ref, jQuery, JavaScript)</a:t>
+            </a:r>
+            <a:r>
+              <a:rPr lang="en-US" sz="1400" b="0" i="0" dirty="0">
+                <a:solidFill>
+                  <a:srgbClr val="202124"/>
+                </a:solidFill>
+                <a:effectLst/>
+                <a:latin typeface="Google Sans"/>
+              </a:rPr>
+              <a:t> called </a:t>
+            </a:r>
+            <a:r>
+              <a:rPr lang="en-US" sz="1400" dirty="0">
+                <a:latin typeface="Google Sans"/>
+                <a:cs typeface="Arial" panose="020B0604020202020204" pitchFamily="34" charset="0"/>
+              </a:rPr>
+              <a:t>controlled</a:t>
+            </a:r>
+            <a:r>
+              <a:rPr lang="en-US" sz="1400" b="0" i="0" dirty="0">
+                <a:solidFill>
+                  <a:srgbClr val="202124"/>
+                </a:solidFill>
+                <a:effectLst/>
+                <a:latin typeface="Google Sans"/>
+              </a:rPr>
+              <a:t> component</a:t>
+            </a:r>
+            <a:r>
+              <a:rPr lang="en-US" sz="1400" dirty="0">
+                <a:solidFill>
+                  <a:srgbClr val="040C28"/>
+                </a:solidFill>
                 <a:latin typeface="Google Sans"/>
                 <a:cs typeface="Arial" panose="020B0604020202020204" pitchFamily="34" charset="0"/>
               </a:rPr>
               <a:t>.</a:t>
-            </a:r>
-          </a:p>
-          <a:p>
-            <a:r>
-              <a:rPr lang="en-US" sz="1400" b="1" dirty="0">
-                <a:latin typeface="Google Sans"/>
-                <a:cs typeface="Arial" panose="020B0604020202020204" pitchFamily="34" charset="0"/>
-              </a:rPr>
-              <a:t>Que 32:</a:t>
-            </a:r>
-            <a:r>
-              <a:rPr lang="en-US" sz="1400" dirty="0">
-                <a:latin typeface="Google Sans"/>
-                <a:cs typeface="Arial" panose="020B0604020202020204" pitchFamily="34" charset="0"/>
-              </a:rPr>
-              <a:t> Why in loop we are used map function instead of for loop?</a:t>
-            </a:r>
-          </a:p>
-          <a:p>
-            <a:r>
-              <a:rPr lang="en-US" sz="1400" b="1" dirty="0">
-                <a:latin typeface="Google Sans"/>
-                <a:cs typeface="Arial" panose="020B0604020202020204" pitchFamily="34" charset="0"/>
-              </a:rPr>
-              <a:t>Ans: </a:t>
-            </a:r>
-            <a:r>
-              <a:rPr lang="en-US" sz="1400" b="0" i="0" dirty="0">
-                <a:solidFill>
-                  <a:srgbClr val="4D5156"/>
-                </a:solidFill>
-                <a:effectLst/>
-                <a:latin typeface="Google Sans"/>
-              </a:rPr>
-              <a:t> </a:t>
-            </a:r>
-            <a:r>
-              <a:rPr lang="en-US" sz="1400" b="0" i="0" dirty="0">
-                <a:effectLst/>
-                <a:latin typeface="Google Sans"/>
-              </a:rPr>
-              <a:t>Because in return function map function is supportive but for loop dose not support in return function.</a:t>
             </a:r>
             <a:endParaRPr lang="en-IN" sz="1400" b="1" dirty="0">
               <a:latin typeface="Google Sans"/>
@@ -6659,14 +6721,14 @@
                 <a:latin typeface="Google Sans"/>
                 <a:cs typeface="Arial" panose="020B0604020202020204" pitchFamily="34" charset="0"/>
               </a:rPr>
-              <a:t>Que 33:</a:t>
-            </a:r>
-            <a:r>
-              <a:rPr lang="en-US" sz="1400" dirty="0">
-                <a:latin typeface="Google Sans"/>
-                <a:cs typeface="Arial" panose="020B0604020202020204" pitchFamily="34" charset="0"/>
-              </a:rPr>
-              <a:t> What is react fragment?</a:t>
+              <a:t>Que 42:</a:t>
+            </a:r>
+            <a:r>
+              <a:rPr lang="en-US" sz="1400" dirty="0">
+                <a:latin typeface="Google Sans"/>
+                <a:cs typeface="Arial" panose="020B0604020202020204" pitchFamily="34" charset="0"/>
+              </a:rPr>
+              <a:t> What is HOC?</a:t>
             </a:r>
           </a:p>
           <a:p>
@@ -6685,26 +6747,7 @@
                 <a:effectLst/>
                 <a:latin typeface="Google Sans"/>
               </a:rPr>
-              <a:t>React Fragment is </a:t>
-            </a:r>
-            <a:r>
-              <a:rPr lang="en-US" sz="1400" b="0" i="0" dirty="0">
-                <a:solidFill>
-                  <a:srgbClr val="040C28"/>
-                </a:solidFill>
-                <a:effectLst/>
-                <a:latin typeface="Google Sans"/>
-              </a:rPr>
-              <a:t>a feature in React that allows you to return multiple elements from a React component by allowing you to group a list of children without adding extra nodes to the DOM. React fragment means</a:t>
-            </a:r>
-            <a:r>
-              <a:rPr lang="en-US" sz="1400" dirty="0">
-                <a:solidFill>
-                  <a:srgbClr val="040C28"/>
-                </a:solidFill>
-                <a:latin typeface="Google Sans"/>
-              </a:rPr>
-              <a:t> (&lt;&gt;&lt;/&gt;) empty tag</a:t>
+              <a:t>HOC means high order component.</a:t>
             </a:r>
             <a:endParaRPr lang="en-IN" sz="1600" b="1" dirty="0">
               <a:latin typeface="Google Sans"/>
@@ -6723,14 +6766,14 @@
                 <a:latin typeface="Google Sans"/>
                 <a:cs typeface="Arial" panose="020B0604020202020204" pitchFamily="34" charset="0"/>
               </a:rPr>
-              <a:t>Que 34:</a:t>
-            </a:r>
-            <a:r>
-              <a:rPr lang="en-US" sz="1400" dirty="0">
-                <a:latin typeface="Google Sans"/>
-                <a:cs typeface="Arial" panose="020B0604020202020204" pitchFamily="34" charset="0"/>
-              </a:rPr>
-              <a:t> What is pure component in react?</a:t>
+              <a:t>Que 43:</a:t>
+            </a:r>
+            <a:r>
+              <a:rPr lang="en-US" sz="1400" dirty="0">
+                <a:latin typeface="Google Sans"/>
+                <a:cs typeface="Arial" panose="020B0604020202020204" pitchFamily="34" charset="0"/>
+              </a:rPr>
+              <a:t> What is API?</a:t>
             </a:r>
           </a:p>
           <a:p>
@@ -6749,7 +6792,7 @@
                 <a:effectLst/>
                 <a:latin typeface="Google Sans"/>
               </a:rPr>
-              <a:t>A React component is considered pure </a:t>
+              <a:t>API means application programing interface</a:t>
             </a:r>
             <a:r>
               <a:rPr lang="en-US" sz="1400" b="0" i="0" dirty="0">
@@ -6759,7 +6802,7 @@
                 <a:effectLst/>
                 <a:latin typeface="Google Sans"/>
               </a:rPr>
-              <a:t>if it renders the same output for the same state and props then stop the components rendering.</a:t>
+              <a:t>.</a:t>
             </a:r>
             <a:endParaRPr lang="en-IN" sz="1400" b="1" dirty="0">
               <a:latin typeface="Google Sans"/>

--- a/QueAns/ReactQusAns.pptx
+++ b/QueAns/ReactQusAns.pptx
@@ -11,6 +11,7 @@
     <p:sldId id="261" r:id="rId5"/>
     <p:sldId id="262" r:id="rId6"/>
     <p:sldId id="263" r:id="rId7"/>
+    <p:sldId id="264" r:id="rId8"/>
   </p:sldIdLst>
   <p:sldSz cx="12192000" cy="6858000"/>
   <p:notesSz cx="6858000" cy="9144000"/>
@@ -343,7 +344,7 @@
           <a:p>
             <a:fld id="{82EDB8D0-98ED-4B86-9D5F-E61ADC70144D}" type="datetimeFigureOut">
               <a:rPr lang="en-US" smtClean="0"/>
-              <a:t>3/9/2024</a:t>
+              <a:t>4/2/2024</a:t>
             </a:fld>
             <a:endParaRPr lang="en-US" dirty="0"/>
           </a:p>
@@ -551,7 +552,7 @@
           <a:p>
             <a:fld id="{82EDB8D0-98ED-4B86-9D5F-E61ADC70144D}" type="datetimeFigureOut">
               <a:rPr lang="en-US" smtClean="0"/>
-              <a:t>3/9/2024</a:t>
+              <a:t>4/2/2024</a:t>
             </a:fld>
             <a:endParaRPr lang="en-US"/>
           </a:p>
@@ -807,7 +808,7 @@
           <a:p>
             <a:fld id="{82EDB8D0-98ED-4B86-9D5F-E61ADC70144D}" type="datetimeFigureOut">
               <a:rPr lang="en-US" smtClean="0"/>
-              <a:t>3/9/2024</a:t>
+              <a:t>4/2/2024</a:t>
             </a:fld>
             <a:endParaRPr lang="en-US"/>
           </a:p>
@@ -977,7 +978,7 @@
           <a:p>
             <a:fld id="{82EDB8D0-98ED-4B86-9D5F-E61ADC70144D}" type="datetimeFigureOut">
               <a:rPr lang="en-US" smtClean="0"/>
-              <a:t>3/9/2024</a:t>
+              <a:t>4/2/2024</a:t>
             </a:fld>
             <a:endParaRPr lang="en-US" dirty="0"/>
           </a:p>
@@ -1320,7 +1321,7 @@
           <a:p>
             <a:fld id="{82EDB8D0-98ED-4B86-9D5F-E61ADC70144D}" type="datetimeFigureOut">
               <a:rPr lang="en-US" smtClean="0"/>
-              <a:t>3/9/2024</a:t>
+              <a:t>4/2/2024</a:t>
             </a:fld>
             <a:endParaRPr lang="en-US"/>
           </a:p>
@@ -1595,7 +1596,7 @@
           <a:p>
             <a:fld id="{82EDB8D0-98ED-4B86-9D5F-E61ADC70144D}" type="datetimeFigureOut">
               <a:rPr lang="en-US" smtClean="0"/>
-              <a:t>3/9/2024</a:t>
+              <a:t>4/2/2024</a:t>
             </a:fld>
             <a:endParaRPr lang="en-US"/>
           </a:p>
@@ -1974,7 +1975,7 @@
           <a:p>
             <a:fld id="{82EDB8D0-98ED-4B86-9D5F-E61ADC70144D}" type="datetimeFigureOut">
               <a:rPr lang="en-US" smtClean="0"/>
-              <a:t>3/9/2024</a:t>
+              <a:t>4/2/2024</a:t>
             </a:fld>
             <a:endParaRPr lang="en-US"/>
           </a:p>
@@ -2092,7 +2093,7 @@
           <a:p>
             <a:fld id="{82EDB8D0-98ED-4B86-9D5F-E61ADC70144D}" type="datetimeFigureOut">
               <a:rPr lang="en-US" smtClean="0"/>
-              <a:t>3/9/2024</a:t>
+              <a:t>4/2/2024</a:t>
             </a:fld>
             <a:endParaRPr lang="en-US"/>
           </a:p>
@@ -2263,7 +2264,7 @@
           <a:p>
             <a:fld id="{82EDB8D0-98ED-4B86-9D5F-E61ADC70144D}" type="datetimeFigureOut">
               <a:rPr lang="en-US" smtClean="0"/>
-              <a:t>3/9/2024</a:t>
+              <a:t>4/2/2024</a:t>
             </a:fld>
             <a:endParaRPr lang="en-US"/>
           </a:p>
@@ -2617,7 +2618,7 @@
           <a:p>
             <a:fld id="{82EDB8D0-98ED-4B86-9D5F-E61ADC70144D}" type="datetimeFigureOut">
               <a:rPr lang="en-US" smtClean="0"/>
-              <a:t>3/9/2024</a:t>
+              <a:t>4/2/2024</a:t>
             </a:fld>
             <a:endParaRPr lang="en-US"/>
           </a:p>
@@ -2994,7 +2995,7 @@
           <a:p>
             <a:fld id="{82EDB8D0-98ED-4B86-9D5F-E61ADC70144D}" type="datetimeFigureOut">
               <a:rPr lang="en-US" smtClean="0"/>
-              <a:t>3/9/2024</a:t>
+              <a:t>4/2/2024</a:t>
             </a:fld>
             <a:endParaRPr lang="en-US"/>
           </a:p>
@@ -3282,7 +3283,7 @@
             <a:fld id="{82EDB8D0-98ED-4B86-9D5F-E61ADC70144D}" type="datetimeFigureOut">
               <a:rPr lang="en-US" smtClean="0"/>
               <a:pPr/>
-              <a:t>3/9/2024</a:t>
+              <a:t>4/2/2024</a:t>
             </a:fld>
             <a:endParaRPr lang="en-US" dirty="0"/>
           </a:p>
@@ -6821,14 +6822,14 @@
                 <a:latin typeface="Google Sans"/>
                 <a:cs typeface="Arial" panose="020B0604020202020204" pitchFamily="34" charset="0"/>
               </a:rPr>
-              <a:t>Que 35:</a:t>
-            </a:r>
-            <a:r>
-              <a:rPr lang="en-US" sz="1400" dirty="0">
-                <a:latin typeface="Google Sans"/>
-                <a:cs typeface="Arial" panose="020B0604020202020204" pitchFamily="34" charset="0"/>
-              </a:rPr>
-              <a:t> Why use useMemo hooks?</a:t>
+              <a:t>Que 44:</a:t>
+            </a:r>
+            <a:r>
+              <a:rPr lang="en-US" sz="1400" dirty="0">
+                <a:latin typeface="Google Sans"/>
+                <a:cs typeface="Arial" panose="020B0604020202020204" pitchFamily="34" charset="0"/>
+              </a:rPr>
+              <a:t> What is redux?</a:t>
             </a:r>
           </a:p>
           <a:p>
@@ -6847,27 +6848,7 @@
                 <a:effectLst/>
                 <a:latin typeface="Google Sans"/>
               </a:rPr>
-              <a:t>The React useMemo Hook </a:t>
-            </a:r>
-            <a:r>
-              <a:rPr lang="en-US" sz="1400" b="0" i="0" dirty="0">
-                <a:solidFill>
-                  <a:srgbClr val="040C28"/>
-                </a:solidFill>
-                <a:effectLst/>
-                <a:latin typeface="Google Sans"/>
-              </a:rPr>
-              <a:t>returns a memorized value</a:t>
-            </a:r>
-            <a:r>
-              <a:rPr lang="en-US" sz="1400" b="0" i="0" dirty="0">
-                <a:solidFill>
-                  <a:srgbClr val="202124"/>
-                </a:solidFill>
-                <a:effectLst/>
-                <a:latin typeface="Google Sans"/>
-              </a:rPr>
-              <a:t>. Think of memorization as caching a value so that it does not need to be recalculated. The useMemo Hook only runs when one of its dependencies update. This can improve performance..</a:t>
+              <a:t>A container where you can store your whole application data.</a:t>
             </a:r>
             <a:endParaRPr lang="en-IN" sz="1600" b="1" dirty="0">
               <a:latin typeface="Google Sans"/>
@@ -6886,14 +6867,14 @@
                 <a:latin typeface="Google Sans"/>
                 <a:cs typeface="Arial" panose="020B0604020202020204" pitchFamily="34" charset="0"/>
               </a:rPr>
-              <a:t>Que 36:</a:t>
-            </a:r>
-            <a:r>
-              <a:rPr lang="en-US" sz="1400" dirty="0">
-                <a:latin typeface="Google Sans"/>
-                <a:cs typeface="Arial" panose="020B0604020202020204" pitchFamily="34" charset="0"/>
-              </a:rPr>
-              <a:t> What is useRef hook in react?</a:t>
+              <a:t>Que 45:</a:t>
+            </a:r>
+            <a:r>
+              <a:rPr lang="en-US" sz="1400" dirty="0">
+                <a:latin typeface="Google Sans"/>
+                <a:cs typeface="Arial" panose="020B0604020202020204" pitchFamily="34" charset="0"/>
+              </a:rPr>
+              <a:t> Why used redux?</a:t>
             </a:r>
           </a:p>
           <a:p>
@@ -6907,31 +6888,35 @@
             <a:r>
               <a:rPr lang="en-US" sz="1400" b="0" i="0" dirty="0">
                 <a:solidFill>
+                  <a:srgbClr val="1F1F1F"/>
+                </a:solidFill>
+                <a:effectLst/>
+                <a:highlight>
+                  <a:srgbClr val="FFFFFF"/>
+                </a:highlight>
+                <a:latin typeface="Google Sans"/>
+              </a:rPr>
+              <a:t>Redux is used </a:t>
+            </a:r>
+            <a:r>
+              <a:rPr lang="en-US" sz="1400" b="0" i="0" dirty="0">
+                <a:solidFill>
+                  <a:srgbClr val="040C28"/>
+                </a:solidFill>
+                <a:effectLst/>
+                <a:latin typeface="Google Sans"/>
+              </a:rPr>
+              <a:t>to maintain and update data across your applications for multiple components to share, all while remaining independent of the components</a:t>
+            </a:r>
+            <a:r>
+              <a:rPr lang="en-US" sz="1400" b="0" i="0" dirty="0">
+                <a:solidFill>
                   <a:srgbClr val="202124"/>
                 </a:solidFill>
                 <a:effectLst/>
                 <a:latin typeface="Google Sans"/>
               </a:rPr>
-              <a:t>Use of the useRef </a:t>
-            </a:r>
-            <a:r>
-              <a:rPr lang="en-US" sz="1400" dirty="0">
-                <a:solidFill>
-                  <a:srgbClr val="202124"/>
-                </a:solidFill>
-                <a:latin typeface="Google Sans"/>
-              </a:rPr>
-              <a:t>hook is to access DOM element directly</a:t>
-            </a:r>
-            <a:r>
-              <a:rPr lang="en-US" sz="1400" b="0" i="0" dirty="0">
-                <a:solidFill>
-                  <a:srgbClr val="202124"/>
-                </a:solidFill>
-                <a:effectLst/>
-                <a:latin typeface="Google Sans"/>
-              </a:rPr>
-              <a:t> .</a:t>
+              <a:t>.</a:t>
             </a:r>
             <a:endParaRPr lang="en-IN" sz="1400" b="1" dirty="0">
               <a:latin typeface="Arial" panose="020B0604020202020204" pitchFamily="34" charset="0"/>
@@ -6974,6 +6959,675 @@
     <p:extLst>
       <p:ext uri="{BB962C8B-B14F-4D97-AF65-F5344CB8AC3E}">
         <p14:creationId xmlns:p14="http://schemas.microsoft.com/office/powerpoint/2010/main" val="3353614732"/>
+      </p:ext>
+    </p:extLst>
+  </p:cSld>
+  <p:clrMapOvr>
+    <a:masterClrMapping/>
+  </p:clrMapOvr>
+</p:sld>
+</file>
+
+<file path=ppt/slides/slide7.xml><?xml version="1.0" encoding="utf-8"?>
+<p:sld xmlns:a="http://schemas.openxmlformats.org/drawingml/2006/main" xmlns:r="http://schemas.openxmlformats.org/officeDocument/2006/relationships" xmlns:p="http://schemas.openxmlformats.org/presentationml/2006/main">
+  <p:cSld>
+    <p:spTree>
+      <p:nvGrpSpPr>
+        <p:cNvPr id="1" name=""/>
+        <p:cNvGrpSpPr/>
+        <p:nvPr/>
+      </p:nvGrpSpPr>
+      <p:grpSpPr>
+        <a:xfrm>
+          <a:off x="0" y="0"/>
+          <a:ext cx="0" cy="0"/>
+          <a:chOff x="0" y="0"/>
+          <a:chExt cx="0" cy="0"/>
+        </a:xfrm>
+      </p:grpSpPr>
+      <p:sp>
+        <p:nvSpPr>
+          <p:cNvPr id="2" name="TextBox 1">
+            <a:extLst>
+              <a:ext uri="{FF2B5EF4-FFF2-40B4-BE49-F238E27FC236}">
+                <a16:creationId xmlns:a16="http://schemas.microsoft.com/office/drawing/2014/main" id="{0FBEB028-EF4C-580D-4D3F-8852E772F600}"/>
+              </a:ext>
+            </a:extLst>
+          </p:cNvPr>
+          <p:cNvSpPr txBox="1"/>
+          <p:nvPr/>
+        </p:nvSpPr>
+        <p:spPr>
+          <a:xfrm>
+            <a:off x="254493" y="390618"/>
+            <a:ext cx="11872404" cy="7078861"/>
+          </a:xfrm>
+          <a:prstGeom prst="rect">
+            <a:avLst/>
+          </a:prstGeom>
+          <a:noFill/>
+        </p:spPr>
+        <p:txBody>
+          <a:bodyPr wrap="square" rtlCol="0">
+            <a:spAutoFit/>
+          </a:bodyPr>
+          <a:lstStyle/>
+          <a:p>
+            <a:pPr marL="0" algn="l" rtl="0" eaLnBrk="1" latinLnBrk="0" hangingPunct="1">
+              <a:spcBef>
+                <a:spcPts val="0"/>
+              </a:spcBef>
+              <a:spcAft>
+                <a:spcPts val="0"/>
+              </a:spcAft>
+            </a:pPr>
+            <a:r>
+              <a:rPr lang="en-US" sz="1400" b="1" kern="1200" dirty="0">
+                <a:solidFill>
+                  <a:srgbClr val="000000"/>
+                </a:solidFill>
+                <a:effectLst/>
+                <a:latin typeface="Google Sans"/>
+                <a:ea typeface="+mn-ea"/>
+                <a:cs typeface="Arial" panose="020B0604020202020204" pitchFamily="34" charset="0"/>
+              </a:rPr>
+              <a:t>Que 46:</a:t>
+            </a:r>
+            <a:r>
+              <a:rPr lang="en-US" sz="1400" kern="1200" dirty="0">
+                <a:solidFill>
+                  <a:srgbClr val="000000"/>
+                </a:solidFill>
+                <a:effectLst/>
+                <a:latin typeface="Google Sans"/>
+                <a:ea typeface="+mn-ea"/>
+                <a:cs typeface="Arial" panose="020B0604020202020204" pitchFamily="34" charset="0"/>
+              </a:rPr>
+              <a:t> In one application we can create multiple store?</a:t>
+            </a:r>
+            <a:endParaRPr lang="en-IN" sz="1400" dirty="0">
+              <a:effectLst/>
+            </a:endParaRPr>
+          </a:p>
+          <a:p>
+            <a:pPr marL="0" algn="l" rtl="0" eaLnBrk="1" latinLnBrk="0" hangingPunct="1">
+              <a:spcBef>
+                <a:spcPts val="0"/>
+              </a:spcBef>
+              <a:spcAft>
+                <a:spcPts val="0"/>
+              </a:spcAft>
+            </a:pPr>
+            <a:r>
+              <a:rPr lang="en-US" sz="1400" b="1" kern="1200" dirty="0">
+                <a:solidFill>
+                  <a:srgbClr val="000000"/>
+                </a:solidFill>
+                <a:effectLst/>
+                <a:latin typeface="Google Sans"/>
+                <a:ea typeface="+mn-ea"/>
+                <a:cs typeface="Arial" panose="020B0604020202020204" pitchFamily="34" charset="0"/>
+              </a:rPr>
+              <a:t>Ans: </a:t>
+            </a:r>
+            <a:r>
+              <a:rPr lang="en-US" sz="1400" b="0" i="0" kern="1200" dirty="0">
+                <a:solidFill>
+                  <a:srgbClr val="202124"/>
+                </a:solidFill>
+                <a:effectLst/>
+                <a:latin typeface="Google Sans"/>
+                <a:ea typeface="+mn-ea"/>
+                <a:cs typeface="+mn-cs"/>
+              </a:rPr>
+              <a:t>No, In one application we can create only one store</a:t>
+            </a:r>
+            <a:r>
+              <a:rPr lang="en-US" sz="1400" b="0" i="0" kern="1200" dirty="0">
+                <a:solidFill>
+                  <a:srgbClr val="040C28"/>
+                </a:solidFill>
+                <a:effectLst/>
+                <a:latin typeface="Google Sans"/>
+                <a:ea typeface="+mn-ea"/>
+                <a:cs typeface="+mn-cs"/>
+              </a:rPr>
+              <a:t>.</a:t>
+            </a:r>
+            <a:endParaRPr lang="en-IN" sz="1400" dirty="0">
+              <a:effectLst/>
+            </a:endParaRPr>
+          </a:p>
+          <a:p>
+            <a:endParaRPr lang="en-US" sz="1400" dirty="0">
+              <a:solidFill>
+                <a:srgbClr val="040C28"/>
+              </a:solidFill>
+              <a:latin typeface="Google Sans"/>
+              <a:cs typeface="Arial" panose="020B0604020202020204" pitchFamily="34" charset="0"/>
+            </a:endParaRPr>
+          </a:p>
+          <a:p>
+            <a:r>
+              <a:rPr lang="en-US" sz="1400" b="1" dirty="0">
+                <a:latin typeface="Google Sans"/>
+                <a:cs typeface="Arial" panose="020B0604020202020204" pitchFamily="34" charset="0"/>
+              </a:rPr>
+              <a:t>Que 47: </a:t>
+            </a:r>
+            <a:r>
+              <a:rPr lang="en-US" sz="1400" dirty="0">
+                <a:latin typeface="Google Sans"/>
+                <a:cs typeface="Arial" panose="020B0604020202020204" pitchFamily="34" charset="0"/>
+              </a:rPr>
+              <a:t>Where we used react state and props?</a:t>
+            </a:r>
+          </a:p>
+          <a:p>
+            <a:r>
+              <a:rPr lang="en-US" sz="1400" b="1" dirty="0">
+                <a:latin typeface="Google Sans"/>
+                <a:cs typeface="Arial" panose="020B0604020202020204" pitchFamily="34" charset="0"/>
+              </a:rPr>
+              <a:t>Ans:  </a:t>
+            </a:r>
+            <a:r>
+              <a:rPr lang="en-US" sz="1400" dirty="0">
+                <a:latin typeface="Google Sans"/>
+                <a:cs typeface="Arial" panose="020B0604020202020204" pitchFamily="34" charset="0"/>
+              </a:rPr>
+              <a:t>Data transfer from one component to another component (from parent </a:t>
+            </a:r>
+            <a:r>
+              <a:rPr lang="en-US" sz="1400">
+                <a:latin typeface="Google Sans"/>
+                <a:cs typeface="Arial" panose="020B0604020202020204" pitchFamily="34" charset="0"/>
+              </a:rPr>
+              <a:t>to child) </a:t>
+            </a:r>
+            <a:r>
+              <a:rPr lang="en-US" sz="1400" dirty="0">
+                <a:latin typeface="Google Sans"/>
+                <a:cs typeface="Arial" panose="020B0604020202020204" pitchFamily="34" charset="0"/>
+              </a:rPr>
+              <a:t>this time we can used props and data transfer in same component we can used state .</a:t>
+            </a:r>
+          </a:p>
+          <a:p>
+            <a:endParaRPr lang="en-US" sz="1400" dirty="0">
+              <a:latin typeface="Google Sans"/>
+              <a:cs typeface="Arial" panose="020B0604020202020204" pitchFamily="34" charset="0"/>
+            </a:endParaRPr>
+          </a:p>
+          <a:p>
+            <a:r>
+              <a:rPr lang="en-US" sz="1400" b="1" dirty="0">
+                <a:latin typeface="Google Sans"/>
+                <a:cs typeface="Arial" panose="020B0604020202020204" pitchFamily="34" charset="0"/>
+              </a:rPr>
+              <a:t>Que 39:</a:t>
+            </a:r>
+            <a:r>
+              <a:rPr lang="en-US" sz="1400" dirty="0">
+                <a:latin typeface="Google Sans"/>
+                <a:cs typeface="Arial" panose="020B0604020202020204" pitchFamily="34" charset="0"/>
+              </a:rPr>
+              <a:t> Which one is better useRef or useState ?</a:t>
+            </a:r>
+          </a:p>
+          <a:p>
+            <a:r>
+              <a:rPr lang="en-US" sz="1400" b="1" dirty="0">
+                <a:latin typeface="Google Sans"/>
+                <a:cs typeface="Arial" panose="020B0604020202020204" pitchFamily="34" charset="0"/>
+              </a:rPr>
+              <a:t>Ans: </a:t>
+            </a:r>
+            <a:r>
+              <a:rPr lang="en-US" sz="1400" dirty="0">
+                <a:solidFill>
+                  <a:srgbClr val="040C28"/>
+                </a:solidFill>
+                <a:latin typeface="Google Sans"/>
+                <a:cs typeface="Arial" panose="020B0604020202020204" pitchFamily="34" charset="0"/>
+              </a:rPr>
+              <a:t>We can used both ref and state also but useRef is directly target to the dom so avoid the use of uesRef.</a:t>
+            </a:r>
+          </a:p>
+          <a:p>
+            <a:endParaRPr lang="en-US" sz="1400" b="1" dirty="0">
+              <a:solidFill>
+                <a:srgbClr val="040C28"/>
+              </a:solidFill>
+              <a:latin typeface="Google Sans"/>
+              <a:cs typeface="Arial" panose="020B0604020202020204" pitchFamily="34" charset="0"/>
+            </a:endParaRPr>
+          </a:p>
+          <a:p>
+            <a:r>
+              <a:rPr lang="en-US" sz="1400" b="1" dirty="0">
+                <a:latin typeface="Google Sans"/>
+                <a:cs typeface="Arial" panose="020B0604020202020204" pitchFamily="34" charset="0"/>
+              </a:rPr>
+              <a:t>Que 40:</a:t>
+            </a:r>
+            <a:r>
+              <a:rPr lang="en-US" sz="1400" dirty="0">
+                <a:latin typeface="Google Sans"/>
+                <a:cs typeface="Arial" panose="020B0604020202020204" pitchFamily="34" charset="0"/>
+              </a:rPr>
+              <a:t> What is controlled component?</a:t>
+            </a:r>
+          </a:p>
+          <a:p>
+            <a:r>
+              <a:rPr lang="en-US" sz="1400" b="1" dirty="0">
+                <a:latin typeface="Google Sans"/>
+                <a:cs typeface="Arial" panose="020B0604020202020204" pitchFamily="34" charset="0"/>
+              </a:rPr>
+              <a:t>Ans: </a:t>
+            </a:r>
+            <a:r>
+              <a:rPr lang="en-US" sz="1400" b="0" i="0" dirty="0">
+                <a:solidFill>
+                  <a:srgbClr val="202124"/>
+                </a:solidFill>
+                <a:effectLst/>
+                <a:latin typeface="Google Sans"/>
+              </a:rPr>
+              <a:t>In this component </a:t>
+            </a:r>
+            <a:r>
+              <a:rPr lang="en-US" sz="1400" dirty="0">
+                <a:solidFill>
+                  <a:srgbClr val="202124"/>
+                </a:solidFill>
+                <a:latin typeface="Google Sans"/>
+              </a:rPr>
+              <a:t>flied handle by state it’s</a:t>
+            </a:r>
+            <a:r>
+              <a:rPr lang="en-US" sz="1400" b="0" i="0" dirty="0">
+                <a:solidFill>
+                  <a:srgbClr val="202124"/>
+                </a:solidFill>
+                <a:effectLst/>
+                <a:latin typeface="Google Sans"/>
+              </a:rPr>
+              <a:t> called </a:t>
+            </a:r>
+            <a:r>
+              <a:rPr lang="en-US" sz="1400" dirty="0">
+                <a:latin typeface="Google Sans"/>
+                <a:cs typeface="Arial" panose="020B0604020202020204" pitchFamily="34" charset="0"/>
+              </a:rPr>
+              <a:t>controlled</a:t>
+            </a:r>
+            <a:r>
+              <a:rPr lang="en-US" sz="1400" b="0" i="0" dirty="0">
+                <a:solidFill>
+                  <a:srgbClr val="202124"/>
+                </a:solidFill>
+                <a:effectLst/>
+                <a:latin typeface="Google Sans"/>
+              </a:rPr>
+              <a:t> component</a:t>
+            </a:r>
+            <a:r>
+              <a:rPr lang="en-US" sz="1400" dirty="0">
+                <a:solidFill>
+                  <a:srgbClr val="040C28"/>
+                </a:solidFill>
+                <a:latin typeface="Google Sans"/>
+                <a:cs typeface="Arial" panose="020B0604020202020204" pitchFamily="34" charset="0"/>
+              </a:rPr>
+              <a:t>.</a:t>
+            </a:r>
+            <a:endParaRPr lang="en-IN" sz="1400" b="1" dirty="0">
+              <a:latin typeface="Google Sans"/>
+              <a:cs typeface="Arial" panose="020B0604020202020204" pitchFamily="34" charset="0"/>
+            </a:endParaRPr>
+          </a:p>
+          <a:p>
+            <a:endParaRPr lang="en-IN" sz="1400" dirty="0">
+              <a:latin typeface="Google Sans"/>
+              <a:cs typeface="Arial" panose="020B0604020202020204" pitchFamily="34" charset="0"/>
+            </a:endParaRPr>
+          </a:p>
+          <a:p>
+            <a:r>
+              <a:rPr lang="en-US" sz="1400" b="1" dirty="0">
+                <a:latin typeface="Google Sans"/>
+                <a:cs typeface="Arial" panose="020B0604020202020204" pitchFamily="34" charset="0"/>
+              </a:rPr>
+              <a:t>Que 41:</a:t>
+            </a:r>
+            <a:r>
+              <a:rPr lang="en-US" sz="1400" dirty="0">
+                <a:latin typeface="Google Sans"/>
+                <a:cs typeface="Arial" panose="020B0604020202020204" pitchFamily="34" charset="0"/>
+              </a:rPr>
+              <a:t> What is uncontrolled component?</a:t>
+            </a:r>
+          </a:p>
+          <a:p>
+            <a:r>
+              <a:rPr lang="en-US" sz="1400" b="1" dirty="0">
+                <a:latin typeface="Google Sans"/>
+                <a:cs typeface="Arial" panose="020B0604020202020204" pitchFamily="34" charset="0"/>
+              </a:rPr>
+              <a:t>Ans: </a:t>
+            </a:r>
+            <a:r>
+              <a:rPr lang="en-US" sz="1400" b="0" i="0" dirty="0">
+                <a:solidFill>
+                  <a:srgbClr val="202124"/>
+                </a:solidFill>
+                <a:effectLst/>
+                <a:latin typeface="Google Sans"/>
+              </a:rPr>
+              <a:t>In this component </a:t>
+            </a:r>
+            <a:r>
+              <a:rPr lang="en-US" sz="1400" dirty="0">
+                <a:solidFill>
+                  <a:srgbClr val="202124"/>
+                </a:solidFill>
+                <a:latin typeface="Google Sans"/>
+              </a:rPr>
+              <a:t>flied handle directly target to the dom element(like, ref, jQuery, JavaScript)</a:t>
+            </a:r>
+            <a:r>
+              <a:rPr lang="en-US" sz="1400" b="0" i="0" dirty="0">
+                <a:solidFill>
+                  <a:srgbClr val="202124"/>
+                </a:solidFill>
+                <a:effectLst/>
+                <a:latin typeface="Google Sans"/>
+              </a:rPr>
+              <a:t> called </a:t>
+            </a:r>
+            <a:r>
+              <a:rPr lang="en-US" sz="1400" dirty="0">
+                <a:latin typeface="Google Sans"/>
+                <a:cs typeface="Arial" panose="020B0604020202020204" pitchFamily="34" charset="0"/>
+              </a:rPr>
+              <a:t>controlled</a:t>
+            </a:r>
+            <a:r>
+              <a:rPr lang="en-US" sz="1400" b="0" i="0" dirty="0">
+                <a:solidFill>
+                  <a:srgbClr val="202124"/>
+                </a:solidFill>
+                <a:effectLst/>
+                <a:latin typeface="Google Sans"/>
+              </a:rPr>
+              <a:t> component</a:t>
+            </a:r>
+            <a:r>
+              <a:rPr lang="en-US" sz="1400" dirty="0">
+                <a:solidFill>
+                  <a:srgbClr val="040C28"/>
+                </a:solidFill>
+                <a:latin typeface="Google Sans"/>
+                <a:cs typeface="Arial" panose="020B0604020202020204" pitchFamily="34" charset="0"/>
+              </a:rPr>
+              <a:t>.</a:t>
+            </a:r>
+            <a:endParaRPr lang="en-IN" sz="1400" b="1" dirty="0">
+              <a:latin typeface="Google Sans"/>
+              <a:cs typeface="Arial" panose="020B0604020202020204" pitchFamily="34" charset="0"/>
+            </a:endParaRPr>
+          </a:p>
+          <a:p>
+            <a:endParaRPr lang="en-IN" sz="1400" b="1" dirty="0">
+              <a:latin typeface="Google Sans"/>
+              <a:cs typeface="Arial" panose="020B0604020202020204" pitchFamily="34" charset="0"/>
+            </a:endParaRPr>
+          </a:p>
+          <a:p>
+            <a:r>
+              <a:rPr lang="en-US" sz="1400" b="1" dirty="0">
+                <a:latin typeface="Google Sans"/>
+                <a:cs typeface="Arial" panose="020B0604020202020204" pitchFamily="34" charset="0"/>
+              </a:rPr>
+              <a:t>Que 42:</a:t>
+            </a:r>
+            <a:r>
+              <a:rPr lang="en-US" sz="1400" dirty="0">
+                <a:latin typeface="Google Sans"/>
+                <a:cs typeface="Arial" panose="020B0604020202020204" pitchFamily="34" charset="0"/>
+              </a:rPr>
+              <a:t> What is HOC?</a:t>
+            </a:r>
+          </a:p>
+          <a:p>
+            <a:r>
+              <a:rPr lang="en-US" sz="1400" b="1" dirty="0">
+                <a:latin typeface="Google Sans"/>
+                <a:cs typeface="Arial" panose="020B0604020202020204" pitchFamily="34" charset="0"/>
+              </a:rPr>
+              <a:t>Ans: </a:t>
+            </a:r>
+            <a:r>
+              <a:rPr lang="en-US" sz="1400" b="0" i="0" dirty="0">
+                <a:solidFill>
+                  <a:srgbClr val="202124"/>
+                </a:solidFill>
+                <a:effectLst/>
+                <a:latin typeface="Google Sans"/>
+              </a:rPr>
+              <a:t>HOC means high order component.</a:t>
+            </a:r>
+            <a:endParaRPr lang="en-IN" sz="1600" b="1" dirty="0">
+              <a:latin typeface="Google Sans"/>
+              <a:cs typeface="Arial" panose="020B0604020202020204" pitchFamily="34" charset="0"/>
+            </a:endParaRPr>
+          </a:p>
+          <a:p>
+            <a:endParaRPr lang="en-IN" sz="1400" b="1" dirty="0">
+              <a:latin typeface="Google Sans"/>
+              <a:cs typeface="Arial" panose="020B0604020202020204" pitchFamily="34" charset="0"/>
+            </a:endParaRPr>
+          </a:p>
+          <a:p>
+            <a:r>
+              <a:rPr lang="en-US" sz="1400" b="1" dirty="0">
+                <a:latin typeface="Google Sans"/>
+                <a:cs typeface="Arial" panose="020B0604020202020204" pitchFamily="34" charset="0"/>
+              </a:rPr>
+              <a:t>Que 43:</a:t>
+            </a:r>
+            <a:r>
+              <a:rPr lang="en-US" sz="1400" dirty="0">
+                <a:latin typeface="Google Sans"/>
+                <a:cs typeface="Arial" panose="020B0604020202020204" pitchFamily="34" charset="0"/>
+              </a:rPr>
+              <a:t> What is API?</a:t>
+            </a:r>
+          </a:p>
+          <a:p>
+            <a:r>
+              <a:rPr lang="en-US" sz="1400" b="1" dirty="0">
+                <a:latin typeface="Google Sans"/>
+                <a:cs typeface="Arial" panose="020B0604020202020204" pitchFamily="34" charset="0"/>
+              </a:rPr>
+              <a:t>Ans: </a:t>
+            </a:r>
+            <a:r>
+              <a:rPr lang="en-US" sz="1400" b="0" i="0" dirty="0">
+                <a:solidFill>
+                  <a:srgbClr val="202124"/>
+                </a:solidFill>
+                <a:effectLst/>
+                <a:latin typeface="Google Sans"/>
+              </a:rPr>
+              <a:t>API means application programing interface</a:t>
+            </a:r>
+            <a:r>
+              <a:rPr lang="en-US" sz="1400" b="0" i="0" dirty="0">
+                <a:solidFill>
+                  <a:srgbClr val="040C28"/>
+                </a:solidFill>
+                <a:effectLst/>
+                <a:latin typeface="Google Sans"/>
+              </a:rPr>
+              <a:t>.</a:t>
+            </a:r>
+            <a:endParaRPr lang="en-IN" sz="1400" b="1" dirty="0">
+              <a:latin typeface="Google Sans"/>
+              <a:cs typeface="Arial" panose="020B0604020202020204" pitchFamily="34" charset="0"/>
+            </a:endParaRPr>
+          </a:p>
+          <a:p>
+            <a:endParaRPr lang="en-IN" sz="1400" b="1" dirty="0">
+              <a:latin typeface="Google Sans"/>
+              <a:cs typeface="Arial" panose="020B0604020202020204" pitchFamily="34" charset="0"/>
+            </a:endParaRPr>
+          </a:p>
+          <a:p>
+            <a:r>
+              <a:rPr lang="en-US" sz="1400" b="1" dirty="0">
+                <a:latin typeface="Google Sans"/>
+                <a:cs typeface="Arial" panose="020B0604020202020204" pitchFamily="34" charset="0"/>
+              </a:rPr>
+              <a:t>Que 44:</a:t>
+            </a:r>
+            <a:r>
+              <a:rPr lang="en-US" sz="1400" dirty="0">
+                <a:latin typeface="Google Sans"/>
+                <a:cs typeface="Arial" panose="020B0604020202020204" pitchFamily="34" charset="0"/>
+              </a:rPr>
+              <a:t> What is redux?</a:t>
+            </a:r>
+          </a:p>
+          <a:p>
+            <a:r>
+              <a:rPr lang="en-US" sz="1400" b="1" dirty="0">
+                <a:latin typeface="Google Sans"/>
+                <a:cs typeface="Arial" panose="020B0604020202020204" pitchFamily="34" charset="0"/>
+              </a:rPr>
+              <a:t>Ans: </a:t>
+            </a:r>
+            <a:r>
+              <a:rPr lang="en-US" sz="1400" b="0" i="0" dirty="0">
+                <a:solidFill>
+                  <a:srgbClr val="202124"/>
+                </a:solidFill>
+                <a:effectLst/>
+                <a:latin typeface="Google Sans"/>
+              </a:rPr>
+              <a:t>A container where you can store your whole application data.</a:t>
+            </a:r>
+            <a:endParaRPr lang="en-IN" sz="1600" b="1" dirty="0">
+              <a:latin typeface="Google Sans"/>
+              <a:cs typeface="Arial" panose="020B0604020202020204" pitchFamily="34" charset="0"/>
+            </a:endParaRPr>
+          </a:p>
+          <a:p>
+            <a:endParaRPr lang="en-IN" sz="1400" b="1" dirty="0">
+              <a:latin typeface="Google Sans"/>
+              <a:cs typeface="Arial" panose="020B0604020202020204" pitchFamily="34" charset="0"/>
+            </a:endParaRPr>
+          </a:p>
+          <a:p>
+            <a:r>
+              <a:rPr lang="en-US" sz="1400" b="1" dirty="0">
+                <a:latin typeface="Google Sans"/>
+                <a:cs typeface="Arial" panose="020B0604020202020204" pitchFamily="34" charset="0"/>
+              </a:rPr>
+              <a:t>Que 45:</a:t>
+            </a:r>
+            <a:r>
+              <a:rPr lang="en-US" sz="1400" dirty="0">
+                <a:latin typeface="Google Sans"/>
+                <a:cs typeface="Arial" panose="020B0604020202020204" pitchFamily="34" charset="0"/>
+              </a:rPr>
+              <a:t> Why used redux?</a:t>
+            </a:r>
+          </a:p>
+          <a:p>
+            <a:r>
+              <a:rPr lang="en-US" sz="1400" b="1" dirty="0">
+                <a:latin typeface="Google Sans"/>
+                <a:cs typeface="Arial" panose="020B0604020202020204" pitchFamily="34" charset="0"/>
+              </a:rPr>
+              <a:t>Ans: </a:t>
+            </a:r>
+            <a:r>
+              <a:rPr lang="en-US" sz="1400" b="0" i="0" dirty="0">
+                <a:solidFill>
+                  <a:srgbClr val="1F1F1F"/>
+                </a:solidFill>
+                <a:effectLst/>
+                <a:highlight>
+                  <a:srgbClr val="FFFFFF"/>
+                </a:highlight>
+                <a:latin typeface="Google Sans"/>
+              </a:rPr>
+              <a:t>Redux is used </a:t>
+            </a:r>
+            <a:r>
+              <a:rPr lang="en-US" sz="1400" b="0" i="0" dirty="0">
+                <a:solidFill>
+                  <a:srgbClr val="040C28"/>
+                </a:solidFill>
+                <a:effectLst/>
+                <a:latin typeface="Google Sans"/>
+              </a:rPr>
+              <a:t>to maintain and update data across your applications for multiple components to share, all while remaining independent of the components</a:t>
+            </a:r>
+            <a:r>
+              <a:rPr lang="en-US" sz="1400" b="0" i="0" dirty="0">
+                <a:solidFill>
+                  <a:srgbClr val="202124"/>
+                </a:solidFill>
+                <a:effectLst/>
+                <a:latin typeface="Google Sans"/>
+              </a:rPr>
+              <a:t>.</a:t>
+            </a:r>
+            <a:endParaRPr lang="en-IN" sz="1400" b="1" dirty="0">
+              <a:latin typeface="Arial" panose="020B0604020202020204" pitchFamily="34" charset="0"/>
+              <a:cs typeface="Arial" panose="020B0604020202020204" pitchFamily="34" charset="0"/>
+            </a:endParaRPr>
+          </a:p>
+          <a:p>
+            <a:endParaRPr lang="en-IN" sz="1600" b="1" dirty="0">
+              <a:latin typeface="Arial" panose="020B0604020202020204" pitchFamily="34" charset="0"/>
+              <a:cs typeface="Arial" panose="020B0604020202020204" pitchFamily="34" charset="0"/>
+            </a:endParaRPr>
+          </a:p>
+          <a:p>
+            <a:endParaRPr lang="en-IN" sz="1400" b="1" dirty="0">
+              <a:latin typeface="Arial" panose="020B0604020202020204" pitchFamily="34" charset="0"/>
+              <a:cs typeface="Arial" panose="020B0604020202020204" pitchFamily="34" charset="0"/>
+            </a:endParaRPr>
+          </a:p>
+          <a:p>
+            <a:endParaRPr lang="en-IN" sz="1400" b="1" dirty="0">
+              <a:latin typeface="Arial" panose="020B0604020202020204" pitchFamily="34" charset="0"/>
+              <a:cs typeface="Arial" panose="020B0604020202020204" pitchFamily="34" charset="0"/>
+            </a:endParaRPr>
+          </a:p>
+          <a:p>
+            <a:endParaRPr lang="en-IN" sz="1600" b="1" dirty="0">
+              <a:latin typeface="Arial" panose="020B0604020202020204" pitchFamily="34" charset="0"/>
+              <a:cs typeface="Arial" panose="020B0604020202020204" pitchFamily="34" charset="0"/>
+            </a:endParaRPr>
+          </a:p>
+          <a:p>
+            <a:endParaRPr lang="en-IN" sz="1600" dirty="0">
+              <a:latin typeface="Arial" panose="020B0604020202020204" pitchFamily="34" charset="0"/>
+              <a:cs typeface="Arial" panose="020B0604020202020204" pitchFamily="34" charset="0"/>
+            </a:endParaRPr>
+          </a:p>
+        </p:txBody>
+      </p:sp>
+    </p:spTree>
+    <p:extLst>
+      <p:ext uri="{BB962C8B-B14F-4D97-AF65-F5344CB8AC3E}">
+        <p14:creationId xmlns:p14="http://schemas.microsoft.com/office/powerpoint/2010/main" val="3557051535"/>
       </p:ext>
     </p:extLst>
   </p:cSld>

--- a/QueAns/ReactQusAns.pptx
+++ b/QueAns/ReactQusAns.pptx
@@ -344,7 +344,7 @@
           <a:p>
             <a:fld id="{82EDB8D0-98ED-4B86-9D5F-E61ADC70144D}" type="datetimeFigureOut">
               <a:rPr lang="en-US" smtClean="0"/>
-              <a:t>4/2/2024</a:t>
+              <a:t>4/3/2024</a:t>
             </a:fld>
             <a:endParaRPr lang="en-US" dirty="0"/>
           </a:p>
@@ -552,7 +552,7 @@
           <a:p>
             <a:fld id="{82EDB8D0-98ED-4B86-9D5F-E61ADC70144D}" type="datetimeFigureOut">
               <a:rPr lang="en-US" smtClean="0"/>
-              <a:t>4/2/2024</a:t>
+              <a:t>4/3/2024</a:t>
             </a:fld>
             <a:endParaRPr lang="en-US"/>
           </a:p>
@@ -808,7 +808,7 @@
           <a:p>
             <a:fld id="{82EDB8D0-98ED-4B86-9D5F-E61ADC70144D}" type="datetimeFigureOut">
               <a:rPr lang="en-US" smtClean="0"/>
-              <a:t>4/2/2024</a:t>
+              <a:t>4/3/2024</a:t>
             </a:fld>
             <a:endParaRPr lang="en-US"/>
           </a:p>
@@ -978,7 +978,7 @@
           <a:p>
             <a:fld id="{82EDB8D0-98ED-4B86-9D5F-E61ADC70144D}" type="datetimeFigureOut">
               <a:rPr lang="en-US" smtClean="0"/>
-              <a:t>4/2/2024</a:t>
+              <a:t>4/3/2024</a:t>
             </a:fld>
             <a:endParaRPr lang="en-US" dirty="0"/>
           </a:p>
@@ -1321,7 +1321,7 @@
           <a:p>
             <a:fld id="{82EDB8D0-98ED-4B86-9D5F-E61ADC70144D}" type="datetimeFigureOut">
               <a:rPr lang="en-US" smtClean="0"/>
-              <a:t>4/2/2024</a:t>
+              <a:t>4/3/2024</a:t>
             </a:fld>
             <a:endParaRPr lang="en-US"/>
           </a:p>
@@ -1596,7 +1596,7 @@
           <a:p>
             <a:fld id="{82EDB8D0-98ED-4B86-9D5F-E61ADC70144D}" type="datetimeFigureOut">
               <a:rPr lang="en-US" smtClean="0"/>
-              <a:t>4/2/2024</a:t>
+              <a:t>4/3/2024</a:t>
             </a:fld>
             <a:endParaRPr lang="en-US"/>
           </a:p>
@@ -1975,7 +1975,7 @@
           <a:p>
             <a:fld id="{82EDB8D0-98ED-4B86-9D5F-E61ADC70144D}" type="datetimeFigureOut">
               <a:rPr lang="en-US" smtClean="0"/>
-              <a:t>4/2/2024</a:t>
+              <a:t>4/3/2024</a:t>
             </a:fld>
             <a:endParaRPr lang="en-US"/>
           </a:p>
@@ -2093,7 +2093,7 @@
           <a:p>
             <a:fld id="{82EDB8D0-98ED-4B86-9D5F-E61ADC70144D}" type="datetimeFigureOut">
               <a:rPr lang="en-US" smtClean="0"/>
-              <a:t>4/2/2024</a:t>
+              <a:t>4/3/2024</a:t>
             </a:fld>
             <a:endParaRPr lang="en-US"/>
           </a:p>
@@ -2264,7 +2264,7 @@
           <a:p>
             <a:fld id="{82EDB8D0-98ED-4B86-9D5F-E61ADC70144D}" type="datetimeFigureOut">
               <a:rPr lang="en-US" smtClean="0"/>
-              <a:t>4/2/2024</a:t>
+              <a:t>4/3/2024</a:t>
             </a:fld>
             <a:endParaRPr lang="en-US"/>
           </a:p>
@@ -2618,7 +2618,7 @@
           <a:p>
             <a:fld id="{82EDB8D0-98ED-4B86-9D5F-E61ADC70144D}" type="datetimeFigureOut">
               <a:rPr lang="en-US" smtClean="0"/>
-              <a:t>4/2/2024</a:t>
+              <a:t>4/3/2024</a:t>
             </a:fld>
             <a:endParaRPr lang="en-US"/>
           </a:p>
@@ -2995,7 +2995,7 @@
           <a:p>
             <a:fld id="{82EDB8D0-98ED-4B86-9D5F-E61ADC70144D}" type="datetimeFigureOut">
               <a:rPr lang="en-US" smtClean="0"/>
-              <a:t>4/2/2024</a:t>
+              <a:t>4/3/2024</a:t>
             </a:fld>
             <a:endParaRPr lang="en-US"/>
           </a:p>
@@ -3283,7 +3283,7 @@
             <a:fld id="{82EDB8D0-98ED-4B86-9D5F-E61ADC70144D}" type="datetimeFigureOut">
               <a:rPr lang="en-US" smtClean="0"/>
               <a:pPr/>
-              <a:t>4/2/2024</a:t>
+              <a:t>4/3/2024</a:t>
             </a:fld>
             <a:endParaRPr lang="en-US" dirty="0"/>
           </a:p>
@@ -7136,21 +7136,7 @@
                 <a:latin typeface="Google Sans"/>
                 <a:cs typeface="Arial" panose="020B0604020202020204" pitchFamily="34" charset="0"/>
               </a:rPr>
-              <a:t>Data transfer from one component to another component (from parent </a:t>
-            </a:r>
-            <a:r>
-              <a:rPr lang="en-US" sz="1400">
-                <a:latin typeface="Google Sans"/>
-                <a:cs typeface="Arial" panose="020B0604020202020204" pitchFamily="34" charset="0"/>
-              </a:rPr>
-              <a:t>to child) </a:t>
-            </a:r>
-            <a:r>
-              <a:rPr lang="en-US" sz="1400" dirty="0">
-                <a:latin typeface="Google Sans"/>
-                <a:cs typeface="Arial" panose="020B0604020202020204" pitchFamily="34" charset="0"/>
-              </a:rPr>
-              <a:t>this time we can used props and data transfer in same component we can used state .</a:t>
+              <a:t>Data transfer from one component to another component (from parent to child) this time we can used props and data transfer in same component we can used state .</a:t>
             </a:r>
           </a:p>
           <a:p>
